--- a/Kaggle Winner Call Jeroen Cottaar.pptx
+++ b/Kaggle Winner Call Jeroen Cottaar.pptx
@@ -5,8 +5,11 @@
     <p:sldMasterId id="2147483648" r:id="rId1"/>
   </p:sldMasterIdLst>
   <p:notesMasterIdLst>
-    <p:notesMasterId r:id="rId16"/>
+    <p:notesMasterId r:id="rId15"/>
   </p:notesMasterIdLst>
+  <p:handoutMasterIdLst>
+    <p:handoutMasterId r:id="rId16"/>
+  </p:handoutMasterIdLst>
   <p:sldIdLst>
     <p:sldId id="256" r:id="rId2"/>
     <p:sldId id="260" r:id="rId3"/>
@@ -16,12 +19,11 @@
     <p:sldId id="284" r:id="rId7"/>
     <p:sldId id="280" r:id="rId8"/>
     <p:sldId id="287" r:id="rId9"/>
-    <p:sldId id="281" r:id="rId10"/>
-    <p:sldId id="279" r:id="rId11"/>
-    <p:sldId id="285" r:id="rId12"/>
-    <p:sldId id="286" r:id="rId13"/>
-    <p:sldId id="277" r:id="rId14"/>
-    <p:sldId id="278" r:id="rId15"/>
+    <p:sldId id="279" r:id="rId10"/>
+    <p:sldId id="288" r:id="rId11"/>
+    <p:sldId id="286" r:id="rId12"/>
+    <p:sldId id="277" r:id="rId13"/>
+    <p:sldId id="278" r:id="rId14"/>
   </p:sldIdLst>
   <p:sldSz cx="9144000" cy="5143500" type="screen16x9"/>
   <p:notesSz cx="6858000" cy="9144000"/>
@@ -370,6 +372,195 @@
 </p:presentation>
 </file>
 
+<file path=ppt/handoutMasters/handoutMaster1.xml><?xml version="1.0" encoding="utf-8"?>
+<p:handoutMaster xmlns:a="http://schemas.openxmlformats.org/drawingml/2006/main" xmlns:r="http://schemas.openxmlformats.org/officeDocument/2006/relationships" xmlns:p="http://schemas.openxmlformats.org/presentationml/2006/main">
+  <p:cSld>
+    <p:bg>
+      <p:bgRef idx="1001">
+        <a:schemeClr val="bg1"/>
+      </p:bgRef>
+    </p:bg>
+    <p:spTree>
+      <p:nvGrpSpPr>
+        <p:cNvPr id="1" name=""/>
+        <p:cNvGrpSpPr/>
+        <p:nvPr/>
+      </p:nvGrpSpPr>
+      <p:grpSpPr>
+        <a:xfrm>
+          <a:off x="0" y="0"/>
+          <a:ext cx="0" cy="0"/>
+          <a:chOff x="0" y="0"/>
+          <a:chExt cx="0" cy="0"/>
+        </a:xfrm>
+      </p:grpSpPr>
+      <p:sp>
+        <p:nvSpPr>
+          <p:cNvPr id="2" name="Header Placeholder 1">
+            <a:extLst>
+              <a:ext uri="{FF2B5EF4-FFF2-40B4-BE49-F238E27FC236}">
+                <a16:creationId xmlns:a16="http://schemas.microsoft.com/office/drawing/2014/main" id="{2ED568EE-7BF4-ED5C-343F-1D21EE56DFD5}"/>
+              </a:ext>
+            </a:extLst>
+          </p:cNvPr>
+          <p:cNvSpPr>
+            <a:spLocks noGrp="1"/>
+          </p:cNvSpPr>
+          <p:nvPr>
+            <p:ph type="hdr" sz="quarter"/>
+          </p:nvPr>
+        </p:nvSpPr>
+        <p:spPr>
+          <a:xfrm>
+            <a:off x="0" y="0"/>
+            <a:ext cx="2971800" cy="458788"/>
+          </a:xfrm>
+          <a:prstGeom prst="rect">
+            <a:avLst/>
+          </a:prstGeom>
+        </p:spPr>
+        <p:txBody>
+          <a:bodyPr vert="horz" lIns="91440" tIns="45720" rIns="91440" bIns="45720" rtlCol="0"/>
+          <a:lstStyle>
+            <a:lvl1pPr algn="l">
+              <a:defRPr sz="1200"/>
+            </a:lvl1pPr>
+          </a:lstStyle>
+          <a:p>
+            <a:endParaRPr lang="en-NL"/>
+          </a:p>
+        </p:txBody>
+      </p:sp>
+      <p:sp>
+        <p:nvSpPr>
+          <p:cNvPr id="3" name="Date Placeholder 2">
+            <a:extLst>
+              <a:ext uri="{FF2B5EF4-FFF2-40B4-BE49-F238E27FC236}">
+                <a16:creationId xmlns:a16="http://schemas.microsoft.com/office/drawing/2014/main" id="{1A95B7A4-BDF8-EA99-14F1-F73207C5BD0D}"/>
+              </a:ext>
+            </a:extLst>
+          </p:cNvPr>
+          <p:cNvSpPr>
+            <a:spLocks noGrp="1"/>
+          </p:cNvSpPr>
+          <p:nvPr>
+            <p:ph type="dt" sz="quarter" idx="1"/>
+          </p:nvPr>
+        </p:nvSpPr>
+        <p:spPr>
+          <a:xfrm>
+            <a:off x="3884613" y="0"/>
+            <a:ext cx="2971800" cy="458788"/>
+          </a:xfrm>
+          <a:prstGeom prst="rect">
+            <a:avLst/>
+          </a:prstGeom>
+        </p:spPr>
+        <p:txBody>
+          <a:bodyPr vert="horz" lIns="91440" tIns="45720" rIns="91440" bIns="45720" rtlCol="0"/>
+          <a:lstStyle>
+            <a:lvl1pPr algn="r">
+              <a:defRPr sz="1200"/>
+            </a:lvl1pPr>
+          </a:lstStyle>
+          <a:p>
+            <a:fld id="{4B158FC1-DF3E-4BCE-8FF8-1DFC850F5AED}" type="datetimeFigureOut">
+              <a:rPr lang="en-NL" smtClean="0"/>
+              <a:t>2025-08-11</a:t>
+            </a:fld>
+            <a:endParaRPr lang="en-NL"/>
+          </a:p>
+        </p:txBody>
+      </p:sp>
+      <p:sp>
+        <p:nvSpPr>
+          <p:cNvPr id="4" name="Footer Placeholder 3">
+            <a:extLst>
+              <a:ext uri="{FF2B5EF4-FFF2-40B4-BE49-F238E27FC236}">
+                <a16:creationId xmlns:a16="http://schemas.microsoft.com/office/drawing/2014/main" id="{DCD120CC-F5CB-A90D-0F0E-28D699E68E48}"/>
+              </a:ext>
+            </a:extLst>
+          </p:cNvPr>
+          <p:cNvSpPr>
+            <a:spLocks noGrp="1"/>
+          </p:cNvSpPr>
+          <p:nvPr>
+            <p:ph type="ftr" sz="quarter" idx="2"/>
+          </p:nvPr>
+        </p:nvSpPr>
+        <p:spPr>
+          <a:xfrm>
+            <a:off x="0" y="8685213"/>
+            <a:ext cx="2971800" cy="458787"/>
+          </a:xfrm>
+          <a:prstGeom prst="rect">
+            <a:avLst/>
+          </a:prstGeom>
+        </p:spPr>
+        <p:txBody>
+          <a:bodyPr vert="horz" lIns="91440" tIns="45720" rIns="91440" bIns="45720" rtlCol="0" anchor="b"/>
+          <a:lstStyle>
+            <a:lvl1pPr algn="l">
+              <a:defRPr sz="1200"/>
+            </a:lvl1pPr>
+          </a:lstStyle>
+          <a:p>
+            <a:endParaRPr lang="en-NL"/>
+          </a:p>
+        </p:txBody>
+      </p:sp>
+      <p:sp>
+        <p:nvSpPr>
+          <p:cNvPr id="5" name="Slide Number Placeholder 4">
+            <a:extLst>
+              <a:ext uri="{FF2B5EF4-FFF2-40B4-BE49-F238E27FC236}">
+                <a16:creationId xmlns:a16="http://schemas.microsoft.com/office/drawing/2014/main" id="{B9565707-81AA-104E-7D8E-0A7863817AD9}"/>
+              </a:ext>
+            </a:extLst>
+          </p:cNvPr>
+          <p:cNvSpPr>
+            <a:spLocks noGrp="1"/>
+          </p:cNvSpPr>
+          <p:nvPr>
+            <p:ph type="sldNum" sz="quarter" idx="3"/>
+          </p:nvPr>
+        </p:nvSpPr>
+        <p:spPr>
+          <a:xfrm>
+            <a:off x="3884613" y="8685213"/>
+            <a:ext cx="2971800" cy="458787"/>
+          </a:xfrm>
+          <a:prstGeom prst="rect">
+            <a:avLst/>
+          </a:prstGeom>
+        </p:spPr>
+        <p:txBody>
+          <a:bodyPr vert="horz" lIns="91440" tIns="45720" rIns="91440" bIns="45720" rtlCol="0" anchor="b"/>
+          <a:lstStyle>
+            <a:lvl1pPr algn="r">
+              <a:defRPr sz="1200"/>
+            </a:lvl1pPr>
+          </a:lstStyle>
+          <a:p>
+            <a:fld id="{62B457BE-42E1-4EEC-AD31-DEDADFA6B972}" type="slidenum">
+              <a:rPr lang="en-NL" smtClean="0"/>
+              <a:t>‹#›</a:t>
+            </a:fld>
+            <a:endParaRPr lang="en-NL"/>
+          </a:p>
+        </p:txBody>
+      </p:sp>
+    </p:spTree>
+    <p:extLst>
+      <p:ext uri="{BB962C8B-B14F-4D97-AF65-F5344CB8AC3E}">
+        <p14:creationId xmlns:p14="http://schemas.microsoft.com/office/powerpoint/2010/main" val="1888786426"/>
+      </p:ext>
+    </p:extLst>
+  </p:cSld>
+  <p:clrMap bg1="lt1" tx1="dk1" bg2="lt2" tx2="dk2" accent1="accent1" accent2="accent2" accent3="accent3" accent4="accent4" accent5="accent5" accent6="accent6" hlink="hlink" folHlink="folHlink"/>
+</p:handoutMaster>
+</file>
+
 <file path=ppt/notesMasters/notesMaster1.xml><?xml version="1.0" encoding="utf-8"?>
 <p:notesMaster xmlns:a="http://schemas.openxmlformats.org/drawingml/2006/main" xmlns:r="http://schemas.openxmlformats.org/officeDocument/2006/relationships" xmlns:p="http://schemas.openxmlformats.org/presentationml/2006/main">
   <p:cSld>
@@ -1739,7 +1930,7 @@
         <p:cNvPr id="1" name="Shape 69">
           <a:extLst>
             <a:ext uri="{FF2B5EF4-FFF2-40B4-BE49-F238E27FC236}">
-              <a16:creationId xmlns:a16="http://schemas.microsoft.com/office/drawing/2014/main" id="{6696FE28-D810-90B0-9A78-AE9D4FA4E356}"/>
+              <a16:creationId xmlns:a16="http://schemas.microsoft.com/office/drawing/2014/main" id="{92CA12DC-9DDD-BD46-E70E-19A2AC6E6F9B}"/>
             </a:ext>
           </a:extLst>
         </p:cNvPr>
@@ -1759,7 +1950,7 @@
           <p:cNvPr id="70" name="Google Shape;70;p3:notes">
             <a:extLst>
               <a:ext uri="{FF2B5EF4-FFF2-40B4-BE49-F238E27FC236}">
-                <a16:creationId xmlns:a16="http://schemas.microsoft.com/office/drawing/2014/main" id="{18895207-CBC4-3CAD-2070-83B620AD3A59}"/>
+                <a16:creationId xmlns:a16="http://schemas.microsoft.com/office/drawing/2014/main" id="{D751EF96-EDE3-CF6B-1488-3D1B46E2EA74}"/>
               </a:ext>
             </a:extLst>
           </p:cNvPr>
@@ -1816,7 +2007,7 @@
           <p:cNvPr id="71" name="Google Shape;71;p3:notes">
             <a:extLst>
               <a:ext uri="{FF2B5EF4-FFF2-40B4-BE49-F238E27FC236}">
-                <a16:creationId xmlns:a16="http://schemas.microsoft.com/office/drawing/2014/main" id="{AA7F5DB6-D963-827F-BD10-298C9F766F79}"/>
+                <a16:creationId xmlns:a16="http://schemas.microsoft.com/office/drawing/2014/main" id="{4C4AC0E2-3754-6B4A-FB2E-4AEA1AB1DD94}"/>
               </a:ext>
             </a:extLst>
           </p:cNvPr>
@@ -1864,7 +2055,7 @@
           <p:cNvPr id="72" name="Google Shape;72;p3:notes">
             <a:extLst>
               <a:ext uri="{FF2B5EF4-FFF2-40B4-BE49-F238E27FC236}">
-                <a16:creationId xmlns:a16="http://schemas.microsoft.com/office/drawing/2014/main" id="{C5E71D35-8A4A-8EB7-4C2F-C0A90E166A4D}"/>
+                <a16:creationId xmlns:a16="http://schemas.microsoft.com/office/drawing/2014/main" id="{A8BFFEE9-BF38-BE17-7A78-63FD288A0842}"/>
               </a:ext>
             </a:extLst>
           </p:cNvPr>
@@ -1914,7 +2105,7 @@
     </p:spTree>
     <p:extLst>
       <p:ext uri="{BB962C8B-B14F-4D97-AF65-F5344CB8AC3E}">
-        <p14:creationId xmlns:p14="http://schemas.microsoft.com/office/powerpoint/2010/main" val="1922067157"/>
+        <p14:creationId xmlns:p14="http://schemas.microsoft.com/office/powerpoint/2010/main" val="3055615705"/>
       </p:ext>
     </p:extLst>
   </p:cSld>
@@ -1925,199 +2116,6 @@
 </file>
 
 <file path=ppt/notesSlides/notesSlide11.xml><?xml version="1.0" encoding="utf-8"?>
-<p:notes xmlns:a="http://schemas.openxmlformats.org/drawingml/2006/main" xmlns:r="http://schemas.openxmlformats.org/officeDocument/2006/relationships" xmlns:p="http://schemas.openxmlformats.org/presentationml/2006/main" showMasterSp="0" showMasterPhAnim="0">
-  <p:cSld>
-    <p:spTree>
-      <p:nvGrpSpPr>
-        <p:cNvPr id="1" name="Shape 69">
-          <a:extLst>
-            <a:ext uri="{FF2B5EF4-FFF2-40B4-BE49-F238E27FC236}">
-              <a16:creationId xmlns:a16="http://schemas.microsoft.com/office/drawing/2014/main" id="{4DAB01D7-72ED-4B7D-794D-CEF61DAC6E96}"/>
-            </a:ext>
-          </a:extLst>
-        </p:cNvPr>
-        <p:cNvGrpSpPr/>
-        <p:nvPr/>
-      </p:nvGrpSpPr>
-      <p:grpSpPr>
-        <a:xfrm>
-          <a:off x="0" y="0"/>
-          <a:ext cx="0" cy="0"/>
-          <a:chOff x="0" y="0"/>
-          <a:chExt cx="0" cy="0"/>
-        </a:xfrm>
-      </p:grpSpPr>
-      <p:sp>
-        <p:nvSpPr>
-          <p:cNvPr id="70" name="Google Shape;70;p3:notes">
-            <a:extLst>
-              <a:ext uri="{FF2B5EF4-FFF2-40B4-BE49-F238E27FC236}">
-                <a16:creationId xmlns:a16="http://schemas.microsoft.com/office/drawing/2014/main" id="{50A241B8-A17F-E48D-EDFF-2826A3FA86C9}"/>
-              </a:ext>
-            </a:extLst>
-          </p:cNvPr>
-          <p:cNvSpPr>
-            <a:spLocks noGrp="1" noRot="1" noChangeAspect="1"/>
-          </p:cNvSpPr>
-          <p:nvPr>
-            <p:ph type="sldImg" idx="2"/>
-          </p:nvPr>
-        </p:nvSpPr>
-        <p:spPr>
-          <a:xfrm>
-            <a:off x="381000" y="685800"/>
-            <a:ext cx="6096000" cy="3429000"/>
-          </a:xfrm>
-          <a:custGeom>
-            <a:avLst/>
-            <a:gdLst/>
-            <a:ahLst/>
-            <a:cxnLst/>
-            <a:rect l="l" t="t" r="r" b="b"/>
-            <a:pathLst>
-              <a:path w="120000" h="120000" extrusionOk="0">
-                <a:moveTo>
-                  <a:pt x="0" y="0"/>
-                </a:moveTo>
-                <a:lnTo>
-                  <a:pt x="120000" y="0"/>
-                </a:lnTo>
-                <a:lnTo>
-                  <a:pt x="120000" y="120000"/>
-                </a:lnTo>
-                <a:lnTo>
-                  <a:pt x="0" y="120000"/>
-                </a:lnTo>
-                <a:close/>
-              </a:path>
-            </a:pathLst>
-          </a:custGeom>
-          <a:noFill/>
-          <a:ln w="12700" cap="flat" cmpd="sng">
-            <a:solidFill>
-              <a:srgbClr val="000000"/>
-            </a:solidFill>
-            <a:prstDash val="solid"/>
-            <a:round/>
-            <a:headEnd type="none" w="sm" len="sm"/>
-            <a:tailEnd type="none" w="sm" len="sm"/>
-          </a:ln>
-        </p:spPr>
-      </p:sp>
-      <p:sp>
-        <p:nvSpPr>
-          <p:cNvPr id="71" name="Google Shape;71;p3:notes">
-            <a:extLst>
-              <a:ext uri="{FF2B5EF4-FFF2-40B4-BE49-F238E27FC236}">
-                <a16:creationId xmlns:a16="http://schemas.microsoft.com/office/drawing/2014/main" id="{4ABB9884-C6BF-1A82-13E2-D8895DED4DFD}"/>
-              </a:ext>
-            </a:extLst>
-          </p:cNvPr>
-          <p:cNvSpPr txBox="1">
-            <a:spLocks noGrp="1"/>
-          </p:cNvSpPr>
-          <p:nvPr>
-            <p:ph type="body" idx="1"/>
-          </p:nvPr>
-        </p:nvSpPr>
-        <p:spPr>
-          <a:xfrm>
-            <a:off x="685800" y="4343400"/>
-            <a:ext cx="5486400" cy="4114800"/>
-          </a:xfrm>
-          <a:prstGeom prst="rect">
-            <a:avLst/>
-          </a:prstGeom>
-          <a:noFill/>
-          <a:ln>
-            <a:noFill/>
-          </a:ln>
-        </p:spPr>
-        <p:txBody>
-          <a:bodyPr spcFirstLastPara="1" wrap="square" lIns="91425" tIns="45700" rIns="91425" bIns="45700" anchor="t" anchorCtr="0">
-            <a:noAutofit/>
-          </a:bodyPr>
-          <a:lstStyle/>
-          <a:p>
-            <a:pPr marL="0" lvl="0" indent="0" algn="l" rtl="0">
-              <a:spcBef>
-                <a:spcPts val="0"/>
-              </a:spcBef>
-              <a:spcAft>
-                <a:spcPts val="0"/>
-              </a:spcAft>
-              <a:buNone/>
-            </a:pPr>
-            <a:endParaRPr/>
-          </a:p>
-        </p:txBody>
-      </p:sp>
-      <p:sp>
-        <p:nvSpPr>
-          <p:cNvPr id="72" name="Google Shape;72;p3:notes">
-            <a:extLst>
-              <a:ext uri="{FF2B5EF4-FFF2-40B4-BE49-F238E27FC236}">
-                <a16:creationId xmlns:a16="http://schemas.microsoft.com/office/drawing/2014/main" id="{C5CA3B76-E47F-7771-1900-2A9E4BA24CEF}"/>
-              </a:ext>
-            </a:extLst>
-          </p:cNvPr>
-          <p:cNvSpPr txBox="1">
-            <a:spLocks noGrp="1"/>
-          </p:cNvSpPr>
-          <p:nvPr>
-            <p:ph type="sldNum" idx="12"/>
-          </p:nvPr>
-        </p:nvSpPr>
-        <p:spPr>
-          <a:xfrm>
-            <a:off x="3884613" y="8685213"/>
-            <a:ext cx="2971800" cy="457200"/>
-          </a:xfrm>
-          <a:prstGeom prst="rect">
-            <a:avLst/>
-          </a:prstGeom>
-          <a:noFill/>
-          <a:ln>
-            <a:noFill/>
-          </a:ln>
-        </p:spPr>
-        <p:txBody>
-          <a:bodyPr spcFirstLastPara="1" wrap="square" lIns="91425" tIns="45700" rIns="91425" bIns="45700" anchor="b" anchorCtr="0">
-            <a:noAutofit/>
-          </a:bodyPr>
-          <a:lstStyle/>
-          <a:p>
-            <a:pPr marL="0" lvl="0" indent="0" algn="r" rtl="0">
-              <a:spcBef>
-                <a:spcPts val="0"/>
-              </a:spcBef>
-              <a:spcAft>
-                <a:spcPts val="0"/>
-              </a:spcAft>
-              <a:buNone/>
-            </a:pPr>
-            <a:fld id="{00000000-1234-1234-1234-123412341234}" type="slidenum">
-              <a:rPr lang="en-US"/>
-              <a:t>11</a:t>
-            </a:fld>
-            <a:endParaRPr/>
-          </a:p>
-        </p:txBody>
-      </p:sp>
-    </p:spTree>
-    <p:extLst>
-      <p:ext uri="{BB962C8B-B14F-4D97-AF65-F5344CB8AC3E}">
-        <p14:creationId xmlns:p14="http://schemas.microsoft.com/office/powerpoint/2010/main" val="1399692247"/>
-      </p:ext>
-    </p:extLst>
-  </p:cSld>
-  <p:clrMapOvr>
-    <a:masterClrMapping/>
-  </p:clrMapOvr>
-</p:notes>
-</file>
-
-<file path=ppt/notesSlides/notesSlide12.xml><?xml version="1.0" encoding="utf-8"?>
 <p:notes xmlns:a="http://schemas.openxmlformats.org/drawingml/2006/main" xmlns:r="http://schemas.openxmlformats.org/officeDocument/2006/relationships" xmlns:p="http://schemas.openxmlformats.org/presentationml/2006/main" showMasterSp="0" showMasterPhAnim="0">
   <p:cSld>
     <p:spTree>
@@ -2291,7 +2289,7 @@
             </a:pPr>
             <a:fld id="{00000000-1234-1234-1234-123412341234}" type="slidenum">
               <a:rPr lang="en-US"/>
-              <a:t>12</a:t>
+              <a:t>11</a:t>
             </a:fld>
             <a:endParaRPr/>
           </a:p>
@@ -2310,7 +2308,7 @@
 </p:notes>
 </file>
 
-<file path=ppt/notesSlides/notesSlide13.xml><?xml version="1.0" encoding="utf-8"?>
+<file path=ppt/notesSlides/notesSlide12.xml><?xml version="1.0" encoding="utf-8"?>
 <p:notes xmlns:a="http://schemas.openxmlformats.org/drawingml/2006/main" xmlns:r="http://schemas.openxmlformats.org/officeDocument/2006/relationships" xmlns:p="http://schemas.openxmlformats.org/presentationml/2006/main" showMasterSp="0" showMasterPhAnim="0">
   <p:cSld>
     <p:spTree>
@@ -2460,7 +2458,7 @@
             </a:pPr>
             <a:fld id="{00000000-1234-1234-1234-123412341234}" type="slidenum">
               <a:rPr lang="en-US"/>
-              <a:t>13</a:t>
+              <a:t>12</a:t>
             </a:fld>
             <a:endParaRPr/>
           </a:p>
@@ -2474,7 +2472,7 @@
 </p:notes>
 </file>
 
-<file path=ppt/notesSlides/notesSlide14.xml><?xml version="1.0" encoding="utf-8"?>
+<file path=ppt/notesSlides/notesSlide13.xml><?xml version="1.0" encoding="utf-8"?>
 <p:notes xmlns:a="http://schemas.openxmlformats.org/drawingml/2006/main" xmlns:r="http://schemas.openxmlformats.org/officeDocument/2006/relationships" xmlns:p="http://schemas.openxmlformats.org/presentationml/2006/main" showMasterSp="0" showMasterPhAnim="0">
   <p:cSld>
     <p:spTree>
@@ -3854,7 +3852,7 @@
         <p:cNvPr id="1" name="Shape 69">
           <a:extLst>
             <a:ext uri="{FF2B5EF4-FFF2-40B4-BE49-F238E27FC236}">
-              <a16:creationId xmlns:a16="http://schemas.microsoft.com/office/drawing/2014/main" id="{11C2DDD5-81E0-6AD6-7A2A-BE9027C41377}"/>
+              <a16:creationId xmlns:a16="http://schemas.microsoft.com/office/drawing/2014/main" id="{6696FE28-D810-90B0-9A78-AE9D4FA4E356}"/>
             </a:ext>
           </a:extLst>
         </p:cNvPr>
@@ -3874,7 +3872,7 @@
           <p:cNvPr id="70" name="Google Shape;70;p3:notes">
             <a:extLst>
               <a:ext uri="{FF2B5EF4-FFF2-40B4-BE49-F238E27FC236}">
-                <a16:creationId xmlns:a16="http://schemas.microsoft.com/office/drawing/2014/main" id="{0F324A22-1800-5A5C-872A-E799D2DD7673}"/>
+                <a16:creationId xmlns:a16="http://schemas.microsoft.com/office/drawing/2014/main" id="{18895207-CBC4-3CAD-2070-83B620AD3A59}"/>
               </a:ext>
             </a:extLst>
           </p:cNvPr>
@@ -3931,7 +3929,7 @@
           <p:cNvPr id="71" name="Google Shape;71;p3:notes">
             <a:extLst>
               <a:ext uri="{FF2B5EF4-FFF2-40B4-BE49-F238E27FC236}">
-                <a16:creationId xmlns:a16="http://schemas.microsoft.com/office/drawing/2014/main" id="{BE1C861D-0FE1-7CBD-E2BE-FAD3B75DBAC8}"/>
+                <a16:creationId xmlns:a16="http://schemas.microsoft.com/office/drawing/2014/main" id="{AA7F5DB6-D963-827F-BD10-298C9F766F79}"/>
               </a:ext>
             </a:extLst>
           </p:cNvPr>
@@ -3979,7 +3977,7 @@
           <p:cNvPr id="72" name="Google Shape;72;p3:notes">
             <a:extLst>
               <a:ext uri="{FF2B5EF4-FFF2-40B4-BE49-F238E27FC236}">
-                <a16:creationId xmlns:a16="http://schemas.microsoft.com/office/drawing/2014/main" id="{158AE891-B752-CC97-2B44-161EF3CFC754}"/>
+                <a16:creationId xmlns:a16="http://schemas.microsoft.com/office/drawing/2014/main" id="{C5E71D35-8A4A-8EB7-4C2F-C0A90E166A4D}"/>
               </a:ext>
             </a:extLst>
           </p:cNvPr>
@@ -4029,7 +4027,7 @@
     </p:spTree>
     <p:extLst>
       <p:ext uri="{BB962C8B-B14F-4D97-AF65-F5344CB8AC3E}">
-        <p14:creationId xmlns:p14="http://schemas.microsoft.com/office/powerpoint/2010/main" val="2444968152"/>
+        <p14:creationId xmlns:p14="http://schemas.microsoft.com/office/powerpoint/2010/main" val="1922067157"/>
       </p:ext>
     </p:extLst>
   </p:cSld>
@@ -9112,7 +9110,7 @@
         <p:cNvPr id="1" name="Shape 73">
           <a:extLst>
             <a:ext uri="{FF2B5EF4-FFF2-40B4-BE49-F238E27FC236}">
-              <a16:creationId xmlns:a16="http://schemas.microsoft.com/office/drawing/2014/main" id="{B23D8C49-2CDB-03F8-23B2-52B81A4110F0}"/>
+              <a16:creationId xmlns:a16="http://schemas.microsoft.com/office/drawing/2014/main" id="{C4D7EC24-8735-D902-47CF-CD2565391571}"/>
             </a:ext>
           </a:extLst>
         </p:cNvPr>
@@ -9132,7 +9130,7 @@
           <p:cNvPr id="75" name="Google Shape;75;p3">
             <a:extLst>
               <a:ext uri="{FF2B5EF4-FFF2-40B4-BE49-F238E27FC236}">
-                <a16:creationId xmlns:a16="http://schemas.microsoft.com/office/drawing/2014/main" id="{65229B62-7007-3837-0ABE-EF3D0284306E}"/>
+                <a16:creationId xmlns:a16="http://schemas.microsoft.com/office/drawing/2014/main" id="{18946A98-B518-393F-0D3A-78CBE11A908D}"/>
               </a:ext>
             </a:extLst>
           </p:cNvPr>
@@ -9184,7 +9182,7 @@
           <p:cNvPr id="76" name="Google Shape;76;p3">
             <a:extLst>
               <a:ext uri="{FF2B5EF4-FFF2-40B4-BE49-F238E27FC236}">
-                <a16:creationId xmlns:a16="http://schemas.microsoft.com/office/drawing/2014/main" id="{1C67E41A-BF9A-80CB-EC7B-9D8B1363F463}"/>
+                <a16:creationId xmlns:a16="http://schemas.microsoft.com/office/drawing/2014/main" id="{F565B0F0-E9C0-5C44-D93B-95B48CB12527}"/>
               </a:ext>
             </a:extLst>
           </p:cNvPr>
@@ -9210,15 +9208,7 @@
           </a:bodyPr>
           <a:lstStyle/>
           <a:p>
-            <a:pPr marL="0" marR="0" lvl="0" indent="0" algn="l" rtl="0">
-              <a:spcBef>
-                <a:spcPts val="0"/>
-              </a:spcBef>
-              <a:spcAft>
-                <a:spcPts val="0"/>
-              </a:spcAft>
-              <a:buNone/>
-            </a:pPr>
+            <a:pPr lvl="0"/>
             <a:r>
               <a:rPr lang="en-US" sz="1200" b="1" dirty="0">
                 <a:solidFill>
@@ -9229,9 +9219,9 @@
                 <a:cs typeface="Inter"/>
                 <a:sym typeface="Inter"/>
               </a:rPr>
-              <a:t>Bayesian Full Waveform Inversion with BFGS and Gauss-Newton</a:t>
+              <a:t>Speedup and cost reduction techniques</a:t>
             </a:r>
-            <a:endParaRPr sz="1600" b="1" dirty="0">
+            <a:endParaRPr lang="en-US" sz="1600" b="1" dirty="0">
               <a:solidFill>
                 <a:schemeClr val="dk1"/>
               </a:solidFill>
@@ -9248,7 +9238,7 @@
           <p:cNvPr id="77" name="Google Shape;77;p3">
             <a:extLst>
               <a:ext uri="{FF2B5EF4-FFF2-40B4-BE49-F238E27FC236}">
-                <a16:creationId xmlns:a16="http://schemas.microsoft.com/office/drawing/2014/main" id="{F3290FFB-39C9-3C0E-3BFA-CB6937F6DB24}"/>
+                <a16:creationId xmlns:a16="http://schemas.microsoft.com/office/drawing/2014/main" id="{DC969022-8C3F-2675-9FF3-B7E9389B25D4}"/>
               </a:ext>
             </a:extLst>
           </p:cNvPr>
@@ -9277,10 +9267,10 @@
       </p:cxnSp>
       <p:sp>
         <p:nvSpPr>
-          <p:cNvPr id="2" name="Google Shape;100;p6">
+          <p:cNvPr id="3" name="Google Shape;91;p5">
             <a:extLst>
               <a:ext uri="{FF2B5EF4-FFF2-40B4-BE49-F238E27FC236}">
-                <a16:creationId xmlns:a16="http://schemas.microsoft.com/office/drawing/2014/main" id="{2E14428D-D890-262D-C37F-A42608BDBC95}"/>
+                <a16:creationId xmlns:a16="http://schemas.microsoft.com/office/drawing/2014/main" id="{832B6FDC-B8D6-52B5-13F1-3A964ABDBE3E}"/>
               </a:ext>
             </a:extLst>
           </p:cNvPr>
@@ -9289,8 +9279,8 @@
         </p:nvSpPr>
         <p:spPr>
           <a:xfrm>
-            <a:off x="1219200" y="997227"/>
-            <a:ext cx="6019800" cy="830956"/>
+            <a:off x="1219200" y="1055133"/>
+            <a:ext cx="5829300" cy="3416279"/>
           </a:xfrm>
           <a:prstGeom prst="rect">
             <a:avLst/>
@@ -9306,7 +9296,7 @@
           </a:bodyPr>
           <a:lstStyle/>
           <a:p>
-            <a:pPr marR="0" lvl="0" algn="l" rtl="0">
+            <a:pPr marL="285750" marR="0" lvl="0" indent="-285750" algn="l" rtl="0">
               <a:lnSpc>
                 <a:spcPct val="120000"/>
               </a:lnSpc>
@@ -9320,6 +9310,8 @@
                 <a:schemeClr val="dk1"/>
               </a:buClr>
               <a:buSzPts val="2000"/>
+              <a:buFont typeface="Arial"/>
+              <a:buChar char="•"/>
             </a:pPr>
             <a:r>
               <a:rPr lang="en-US" sz="2000" dirty="0">
@@ -9328,9 +9320,120 @@
                 </a:solidFill>
                 <a:latin typeface="Inter"/>
                 <a:ea typeface="Inter"/>
+                <a:cs typeface="Inter"/>
                 <a:sym typeface="Inter"/>
               </a:rPr>
-              <a:t>Solver, describe shortly, why not gradient descent?, preconditioning didn’t help</a:t>
+              <a:t>Custom CUDA kernel for forward modeling: 30 </a:t>
+            </a:r>
+            <a:r>
+              <a:rPr lang="en-US" sz="2000" dirty="0" err="1">
+                <a:solidFill>
+                  <a:schemeClr val="dk1"/>
+                </a:solidFill>
+                <a:latin typeface="Inter"/>
+                <a:ea typeface="Inter"/>
+                <a:cs typeface="Inter"/>
+                <a:sym typeface="Inter"/>
+              </a:rPr>
+              <a:t>ms</a:t>
+            </a:r>
+            <a:r>
+              <a:rPr lang="en-US" sz="2000" dirty="0">
+                <a:solidFill>
+                  <a:schemeClr val="dk1"/>
+                </a:solidFill>
+                <a:latin typeface="Inter"/>
+                <a:ea typeface="Inter"/>
+                <a:cs typeface="Inter"/>
+                <a:sym typeface="Inter"/>
+              </a:rPr>
+              <a:t> to compute seismogram, 70 </a:t>
+            </a:r>
+            <a:r>
+              <a:rPr lang="en-US" sz="2000" dirty="0" err="1">
+                <a:solidFill>
+                  <a:schemeClr val="dk1"/>
+                </a:solidFill>
+                <a:latin typeface="Inter"/>
+                <a:ea typeface="Inter"/>
+                <a:cs typeface="Inter"/>
+                <a:sym typeface="Inter"/>
+              </a:rPr>
+              <a:t>ms</a:t>
+            </a:r>
+            <a:r>
+              <a:rPr lang="en-US" sz="2000" dirty="0">
+                <a:solidFill>
+                  <a:schemeClr val="dk1"/>
+                </a:solidFill>
+                <a:latin typeface="Inter"/>
+                <a:ea typeface="Inter"/>
+                <a:cs typeface="Inter"/>
+                <a:sym typeface="Inter"/>
+              </a:rPr>
+              <a:t> for backward pass to compute gradients (manually implemented, not through Torch)</a:t>
+            </a:r>
+          </a:p>
+          <a:p>
+            <a:pPr marL="285750" marR="0" lvl="0" indent="-285750" algn="l" rtl="0">
+              <a:lnSpc>
+                <a:spcPct val="120000"/>
+              </a:lnSpc>
+              <a:spcBef>
+                <a:spcPts val="0"/>
+              </a:spcBef>
+              <a:spcAft>
+                <a:spcPts val="0"/>
+              </a:spcAft>
+              <a:buClr>
+                <a:schemeClr val="dk1"/>
+              </a:buClr>
+              <a:buSzPts val="2000"/>
+              <a:buFont typeface="Arial"/>
+              <a:buChar char="•"/>
+            </a:pPr>
+            <a:r>
+              <a:rPr lang="en-US" sz="2000" dirty="0">
+                <a:solidFill>
+                  <a:schemeClr val="dk1"/>
+                </a:solidFill>
+                <a:latin typeface="Inter"/>
+                <a:ea typeface="Inter"/>
+                <a:cs typeface="Inter"/>
+                <a:sym typeface="Inter"/>
+              </a:rPr>
+              <a:t>Custom CUDA kernel to speed up Hessian inversion steps in BFGS</a:t>
+            </a:r>
+          </a:p>
+          <a:p>
+            <a:pPr marL="285750" marR="0" lvl="0" indent="-285750" algn="l" rtl="0">
+              <a:lnSpc>
+                <a:spcPct val="120000"/>
+              </a:lnSpc>
+              <a:spcBef>
+                <a:spcPts val="0"/>
+              </a:spcBef>
+              <a:spcAft>
+                <a:spcPts val="0"/>
+              </a:spcAft>
+              <a:buClr>
+                <a:schemeClr val="dk1"/>
+              </a:buClr>
+              <a:buSzPts val="2000"/>
+              <a:buFont typeface="Arial"/>
+              <a:buChar char="•"/>
+            </a:pPr>
+            <a:r>
+              <a:rPr lang="en-US" sz="2000" dirty="0">
+                <a:solidFill>
+                  <a:schemeClr val="dk1"/>
+                </a:solidFill>
+                <a:latin typeface="Inter"/>
+                <a:ea typeface="Inter"/>
+                <a:cs typeface="Inter"/>
+                <a:sym typeface="Inter"/>
+              </a:rPr>
+              <a:t>Cost reduction: using V100, an older and cheaper GPU with excellent FP64 performance</a:t>
             </a:r>
           </a:p>
         </p:txBody>
@@ -9338,7 +9441,7 @@
     </p:spTree>
     <p:extLst>
       <p:ext uri="{BB962C8B-B14F-4D97-AF65-F5344CB8AC3E}">
-        <p14:creationId xmlns:p14="http://schemas.microsoft.com/office/powerpoint/2010/main" val="2718900522"/>
+        <p14:creationId xmlns:p14="http://schemas.microsoft.com/office/powerpoint/2010/main" val="3932194216"/>
       </p:ext>
     </p:extLst>
   </p:cSld>
@@ -9349,278 +9452,6 @@
 </file>
 
 <file path=ppt/slides/slide11.xml><?xml version="1.0" encoding="utf-8"?>
-<p:sld xmlns:a="http://schemas.openxmlformats.org/drawingml/2006/main" xmlns:r="http://schemas.openxmlformats.org/officeDocument/2006/relationships" xmlns:p="http://schemas.openxmlformats.org/presentationml/2006/main">
-  <p:cSld>
-    <p:spTree>
-      <p:nvGrpSpPr>
-        <p:cNvPr id="1" name="Shape 73">
-          <a:extLst>
-            <a:ext uri="{FF2B5EF4-FFF2-40B4-BE49-F238E27FC236}">
-              <a16:creationId xmlns:a16="http://schemas.microsoft.com/office/drawing/2014/main" id="{8E300DB9-DAA6-E0E4-88F2-F1798369CC8A}"/>
-            </a:ext>
-          </a:extLst>
-        </p:cNvPr>
-        <p:cNvGrpSpPr/>
-        <p:nvPr/>
-      </p:nvGrpSpPr>
-      <p:grpSpPr>
-        <a:xfrm>
-          <a:off x="0" y="0"/>
-          <a:ext cx="0" cy="0"/>
-          <a:chOff x="0" y="0"/>
-          <a:chExt cx="0" cy="0"/>
-        </a:xfrm>
-      </p:grpSpPr>
-      <p:sp>
-        <p:nvSpPr>
-          <p:cNvPr id="75" name="Google Shape;75;p3">
-            <a:extLst>
-              <a:ext uri="{FF2B5EF4-FFF2-40B4-BE49-F238E27FC236}">
-                <a16:creationId xmlns:a16="http://schemas.microsoft.com/office/drawing/2014/main" id="{C3AF4C51-D773-041A-8848-DDF0BA47752C}"/>
-              </a:ext>
-            </a:extLst>
-          </p:cNvPr>
-          <p:cNvSpPr txBox="1">
-            <a:spLocks noGrp="1"/>
-          </p:cNvSpPr>
-          <p:nvPr>
-            <p:ph type="sldNum" idx="12"/>
-          </p:nvPr>
-        </p:nvSpPr>
-        <p:spPr>
-          <a:xfrm>
-            <a:off x="6934200" y="4794706"/>
-            <a:ext cx="2057400" cy="274637"/>
-          </a:xfrm>
-          <a:prstGeom prst="rect">
-            <a:avLst/>
-          </a:prstGeom>
-          <a:noFill/>
-          <a:ln>
-            <a:noFill/>
-          </a:ln>
-        </p:spPr>
-        <p:txBody>
-          <a:bodyPr spcFirstLastPara="1" wrap="square" lIns="91425" tIns="45700" rIns="91425" bIns="45700" anchor="ctr" anchorCtr="0">
-            <a:noAutofit/>
-          </a:bodyPr>
-          <a:lstStyle/>
-          <a:p>
-            <a:pPr marL="0" lvl="0" indent="0" algn="r" rtl="0">
-              <a:spcBef>
-                <a:spcPts val="0"/>
-              </a:spcBef>
-              <a:spcAft>
-                <a:spcPts val="0"/>
-              </a:spcAft>
-              <a:buNone/>
-            </a:pPr>
-            <a:fld id="{00000000-1234-1234-1234-123412341234}" type="slidenum">
-              <a:rPr lang="en-US"/>
-              <a:t>11</a:t>
-            </a:fld>
-            <a:endParaRPr/>
-          </a:p>
-        </p:txBody>
-      </p:sp>
-      <p:sp>
-        <p:nvSpPr>
-          <p:cNvPr id="76" name="Google Shape;76;p3">
-            <a:extLst>
-              <a:ext uri="{FF2B5EF4-FFF2-40B4-BE49-F238E27FC236}">
-                <a16:creationId xmlns:a16="http://schemas.microsoft.com/office/drawing/2014/main" id="{49CDCCBA-72F4-38AC-5595-4207A21F3A20}"/>
-              </a:ext>
-            </a:extLst>
-          </p:cNvPr>
-          <p:cNvSpPr/>
-          <p:nvPr/>
-        </p:nvSpPr>
-        <p:spPr>
-          <a:xfrm>
-            <a:off x="274983" y="183874"/>
-            <a:ext cx="5135217" cy="276959"/>
-          </a:xfrm>
-          <a:prstGeom prst="rect">
-            <a:avLst/>
-          </a:prstGeom>
-          <a:noFill/>
-          <a:ln>
-            <a:noFill/>
-          </a:ln>
-        </p:spPr>
-        <p:txBody>
-          <a:bodyPr spcFirstLastPara="1" wrap="square" lIns="91425" tIns="45700" rIns="91425" bIns="45700" anchor="t" anchorCtr="0">
-            <a:spAutoFit/>
-          </a:bodyPr>
-          <a:lstStyle/>
-          <a:p>
-            <a:pPr marL="0" marR="0" lvl="0" indent="0" algn="l" rtl="0">
-              <a:spcBef>
-                <a:spcPts val="0"/>
-              </a:spcBef>
-              <a:spcAft>
-                <a:spcPts val="0"/>
-              </a:spcAft>
-              <a:buNone/>
-            </a:pPr>
-            <a:r>
-              <a:rPr lang="en-US" sz="1200" b="1" dirty="0">
-                <a:solidFill>
-                  <a:schemeClr val="dk1"/>
-                </a:solidFill>
-                <a:latin typeface="Inter"/>
-                <a:ea typeface="Inter"/>
-                <a:cs typeface="Inter"/>
-                <a:sym typeface="Inter"/>
-              </a:rPr>
-              <a:t>Speedup and cost reduction techniques</a:t>
-            </a:r>
-            <a:endParaRPr sz="1600" b="1" dirty="0">
-              <a:solidFill>
-                <a:schemeClr val="dk1"/>
-              </a:solidFill>
-              <a:latin typeface="Inter"/>
-              <a:ea typeface="Inter"/>
-              <a:cs typeface="Inter"/>
-              <a:sym typeface="Inter"/>
-            </a:endParaRPr>
-          </a:p>
-        </p:txBody>
-      </p:sp>
-      <p:cxnSp>
-        <p:nvCxnSpPr>
-          <p:cNvPr id="77" name="Google Shape;77;p3">
-            <a:extLst>
-              <a:ext uri="{FF2B5EF4-FFF2-40B4-BE49-F238E27FC236}">
-                <a16:creationId xmlns:a16="http://schemas.microsoft.com/office/drawing/2014/main" id="{CE8A37C2-011B-9773-2865-E47D0C2A933F}"/>
-              </a:ext>
-            </a:extLst>
-          </p:cNvPr>
-          <p:cNvCxnSpPr/>
-          <p:nvPr/>
-        </p:nvCxnSpPr>
-        <p:spPr>
-          <a:xfrm>
-            <a:off x="304800" y="590550"/>
-            <a:ext cx="8597015" cy="0"/>
-          </a:xfrm>
-          <a:prstGeom prst="straightConnector1">
-            <a:avLst/>
-          </a:prstGeom>
-          <a:noFill/>
-          <a:ln w="25400" cap="flat" cmpd="sng">
-            <a:solidFill>
-              <a:srgbClr val="FAE041"/>
-            </a:solidFill>
-            <a:prstDash val="solid"/>
-            <a:round/>
-            <a:headEnd type="none" w="sm" len="sm"/>
-            <a:tailEnd type="none" w="sm" len="sm"/>
-          </a:ln>
-        </p:spPr>
-      </p:cxnSp>
-      <p:sp>
-        <p:nvSpPr>
-          <p:cNvPr id="2" name="Google Shape;100;p6">
-            <a:extLst>
-              <a:ext uri="{FF2B5EF4-FFF2-40B4-BE49-F238E27FC236}">
-                <a16:creationId xmlns:a16="http://schemas.microsoft.com/office/drawing/2014/main" id="{C37F74EC-15B4-FB4A-7E86-665759CCAFB9}"/>
-              </a:ext>
-            </a:extLst>
-          </p:cNvPr>
-          <p:cNvSpPr txBox="1"/>
-          <p:nvPr/>
-        </p:nvSpPr>
-        <p:spPr>
-          <a:xfrm>
-            <a:off x="1219200" y="997227"/>
-            <a:ext cx="6019800" cy="830956"/>
-          </a:xfrm>
-          <a:prstGeom prst="rect">
-            <a:avLst/>
-          </a:prstGeom>
-          <a:noFill/>
-          <a:ln>
-            <a:noFill/>
-          </a:ln>
-        </p:spPr>
-        <p:txBody>
-          <a:bodyPr spcFirstLastPara="1" wrap="square" lIns="91425" tIns="45700" rIns="91425" bIns="45700" anchor="t" anchorCtr="0">
-            <a:spAutoFit/>
-          </a:bodyPr>
-          <a:lstStyle/>
-          <a:p>
-            <a:pPr marR="0" lvl="0" algn="l" rtl="0">
-              <a:lnSpc>
-                <a:spcPct val="120000"/>
-              </a:lnSpc>
-              <a:spcBef>
-                <a:spcPts val="0"/>
-              </a:spcBef>
-              <a:spcAft>
-                <a:spcPts val="0"/>
-              </a:spcAft>
-              <a:buClr>
-                <a:schemeClr val="dk1"/>
-              </a:buClr>
-              <a:buSzPts val="2000"/>
-            </a:pPr>
-            <a:r>
-              <a:rPr lang="en-US" sz="2000" dirty="0">
-                <a:solidFill>
-                  <a:schemeClr val="dk1"/>
-                </a:solidFill>
-                <a:latin typeface="Inter"/>
-                <a:ea typeface="Inter"/>
-                <a:sym typeface="Inter"/>
-              </a:rPr>
-              <a:t>CUDA, show, should be possible to improve</a:t>
-            </a:r>
-          </a:p>
-          <a:p>
-            <a:pPr marR="0" lvl="0" algn="l" rtl="0">
-              <a:lnSpc>
-                <a:spcPct val="120000"/>
-              </a:lnSpc>
-              <a:spcBef>
-                <a:spcPts val="0"/>
-              </a:spcBef>
-              <a:spcAft>
-                <a:spcPts val="0"/>
-              </a:spcAft>
-              <a:buClr>
-                <a:schemeClr val="dk1"/>
-              </a:buClr>
-              <a:buSzPts val="2000"/>
-            </a:pPr>
-            <a:r>
-              <a:rPr lang="en-US" sz="2000" dirty="0">
-                <a:solidFill>
-                  <a:schemeClr val="dk1"/>
-                </a:solidFill>
-                <a:latin typeface="Inter"/>
-                <a:ea typeface="Inter"/>
-                <a:sym typeface="Inter"/>
-              </a:rPr>
-              <a:t>Mention use of cheap FP64 GPU (V100)</a:t>
-            </a:r>
-          </a:p>
-        </p:txBody>
-      </p:sp>
-    </p:spTree>
-    <p:extLst>
-      <p:ext uri="{BB962C8B-B14F-4D97-AF65-F5344CB8AC3E}">
-        <p14:creationId xmlns:p14="http://schemas.microsoft.com/office/powerpoint/2010/main" val="1942097256"/>
-      </p:ext>
-    </p:extLst>
-  </p:cSld>
-  <p:clrMapOvr>
-    <a:masterClrMapping/>
-  </p:clrMapOvr>
-</p:sld>
-</file>
-
-<file path=ppt/slides/slide12.xml><?xml version="1.0" encoding="utf-8"?>
 <p:sld xmlns:a="http://schemas.openxmlformats.org/drawingml/2006/main" xmlns:r="http://schemas.openxmlformats.org/officeDocument/2006/relationships" xmlns:p="http://schemas.openxmlformats.org/presentationml/2006/main">
   <p:cSld>
     <p:spTree>
@@ -9689,7 +9520,7 @@
             </a:pPr>
             <a:fld id="{00000000-1234-1234-1234-123412341234}" type="slidenum">
               <a:rPr lang="en-US"/>
-              <a:t>12</a:t>
+              <a:t>11</a:t>
             </a:fld>
             <a:endParaRPr/>
           </a:p>
@@ -9745,7 +9576,7 @@
                 <a:cs typeface="Inter"/>
                 <a:sym typeface="Inter"/>
               </a:rPr>
-              <a:t>Closing thoughts: deep learning vs Bayesian methods for full waveform inversion</a:t>
+              <a:t>Closing thoughts: deep learning vs Bayesian methods for full waveform inversion – within the confines of this competition</a:t>
             </a:r>
             <a:endParaRPr sz="1600" b="1" dirty="0">
               <a:solidFill>
@@ -9793,10 +9624,10 @@
       </p:cxnSp>
       <p:sp>
         <p:nvSpPr>
-          <p:cNvPr id="2" name="Google Shape;100;p6">
+          <p:cNvPr id="3" name="Google Shape;91;p5">
             <a:extLst>
               <a:ext uri="{FF2B5EF4-FFF2-40B4-BE49-F238E27FC236}">
-                <a16:creationId xmlns:a16="http://schemas.microsoft.com/office/drawing/2014/main" id="{DA995027-D9F5-930E-9C50-89B81D7BF8BD}"/>
+                <a16:creationId xmlns:a16="http://schemas.microsoft.com/office/drawing/2014/main" id="{238690AD-6D4F-6DA9-09B4-740477883E31}"/>
               </a:ext>
             </a:extLst>
           </p:cNvPr>
@@ -9805,8 +9636,8 @@
         </p:nvSpPr>
         <p:spPr>
           <a:xfrm>
-            <a:off x="1219200" y="997227"/>
-            <a:ext cx="6019800" cy="461624"/>
+            <a:off x="1178104" y="3284625"/>
+            <a:ext cx="6137096" cy="1200288"/>
           </a:xfrm>
           <a:prstGeom prst="rect">
             <a:avLst/>
@@ -9822,7 +9653,7 @@
           </a:bodyPr>
           <a:lstStyle/>
           <a:p>
-            <a:pPr marR="0" lvl="0" algn="l" rtl="0">
+            <a:pPr marL="285750" marR="0" lvl="0" indent="-285750" algn="l" rtl="0">
               <a:lnSpc>
                 <a:spcPct val="120000"/>
               </a:lnSpc>
@@ -9836,6 +9667,8 @@
                 <a:schemeClr val="dk1"/>
               </a:buClr>
               <a:buSzPts val="2000"/>
+              <a:buFont typeface="Arial"/>
+              <a:buChar char="•"/>
             </a:pPr>
             <a:r>
               <a:rPr lang="en-US" sz="2000" dirty="0">
@@ -9844,13 +9677,391 @@
                 </a:solidFill>
                 <a:latin typeface="Inter"/>
                 <a:ea typeface="Inter"/>
+                <a:cs typeface="Inter"/>
                 <a:sym typeface="Inter"/>
               </a:rPr>
-              <a:t>XXX</a:t>
+              <a:t>Not black or white: can use hybrid approaches</a:t>
+            </a:r>
+          </a:p>
+          <a:p>
+            <a:pPr marL="285750" marR="0" lvl="0" indent="-285750" algn="l" rtl="0">
+              <a:lnSpc>
+                <a:spcPct val="120000"/>
+              </a:lnSpc>
+              <a:spcBef>
+                <a:spcPts val="0"/>
+              </a:spcBef>
+              <a:spcAft>
+                <a:spcPts val="0"/>
+              </a:spcAft>
+              <a:buClr>
+                <a:schemeClr val="dk1"/>
+              </a:buClr>
+              <a:buSzPts val="2000"/>
+              <a:buFont typeface="Arial"/>
+              <a:buChar char="•"/>
+            </a:pPr>
+            <a:r>
+              <a:rPr lang="en-US" sz="2000" dirty="0">
+                <a:solidFill>
+                  <a:schemeClr val="dk1"/>
+                </a:solidFill>
+                <a:latin typeface="Inter"/>
+                <a:ea typeface="Inter"/>
+                <a:cs typeface="Inter"/>
+                <a:sym typeface="Inter"/>
+              </a:rPr>
+              <a:t>Big unknown: how does this all scale to the real world – especially to 3D and unclear priors</a:t>
             </a:r>
           </a:p>
         </p:txBody>
       </p:sp>
+      <p:graphicFrame>
+        <p:nvGraphicFramePr>
+          <p:cNvPr id="4" name="Table 3">
+            <a:extLst>
+              <a:ext uri="{FF2B5EF4-FFF2-40B4-BE49-F238E27FC236}">
+                <a16:creationId xmlns:a16="http://schemas.microsoft.com/office/drawing/2014/main" id="{15429F2B-9495-0753-3DB0-EA7FCF62133C}"/>
+              </a:ext>
+            </a:extLst>
+          </p:cNvPr>
+          <p:cNvGraphicFramePr>
+            <a:graphicFrameLocks noGrp="1"/>
+          </p:cNvGraphicFramePr>
+          <p:nvPr>
+            <p:extLst>
+              <p:ext uri="{D42A27DB-BD31-4B8C-83A1-F6EECF244321}">
+                <p14:modId xmlns:p14="http://schemas.microsoft.com/office/powerpoint/2010/main" val="3526184629"/>
+              </p:ext>
+            </p:extLst>
+          </p:nvPr>
+        </p:nvGraphicFramePr>
+        <p:xfrm>
+          <a:off x="1400711" y="955291"/>
+          <a:ext cx="6096000" cy="2148840"/>
+        </p:xfrm>
+        <a:graphic>
+          <a:graphicData uri="http://schemas.openxmlformats.org/drawingml/2006/table">
+            <a:tbl>
+              <a:tblPr firstRow="1" bandRow="1">
+                <a:tableStyleId>{5C22544A-7EE6-4342-B048-85BDC9FD1C3A}</a:tableStyleId>
+              </a:tblPr>
+              <a:tblGrid>
+                <a:gridCol w="2032000">
+                  <a:extLst>
+                    <a:ext uri="{9D8B030D-6E8A-4147-A177-3AD203B41FA5}">
+                      <a16:colId xmlns:a16="http://schemas.microsoft.com/office/drawing/2014/main" val="1843039297"/>
+                    </a:ext>
+                  </a:extLst>
+                </a:gridCol>
+                <a:gridCol w="2032000">
+                  <a:extLst>
+                    <a:ext uri="{9D8B030D-6E8A-4147-A177-3AD203B41FA5}">
+                      <a16:colId xmlns:a16="http://schemas.microsoft.com/office/drawing/2014/main" val="3180500038"/>
+                    </a:ext>
+                  </a:extLst>
+                </a:gridCol>
+                <a:gridCol w="2032000">
+                  <a:extLst>
+                    <a:ext uri="{9D8B030D-6E8A-4147-A177-3AD203B41FA5}">
+                      <a16:colId xmlns:a16="http://schemas.microsoft.com/office/drawing/2014/main" val="3055376423"/>
+                    </a:ext>
+                  </a:extLst>
+                </a:gridCol>
+              </a:tblGrid>
+              <a:tr h="370840">
+                <a:tc>
+                  <a:txBody>
+                    <a:bodyPr/>
+                    <a:lstStyle/>
+                    <a:p>
+                      <a:endParaRPr lang="en-NL"/>
+                    </a:p>
+                  </a:txBody>
+                  <a:tcPr/>
+                </a:tc>
+                <a:tc>
+                  <a:txBody>
+                    <a:bodyPr/>
+                    <a:lstStyle/>
+                    <a:p>
+                      <a:r>
+                        <a:rPr lang="en-US" dirty="0">
+                          <a:solidFill>
+                            <a:schemeClr val="tx1"/>
+                          </a:solidFill>
+                        </a:rPr>
+                        <a:t>Bayesian</a:t>
+                      </a:r>
+                      <a:endParaRPr lang="en-NL" dirty="0">
+                        <a:solidFill>
+                          <a:schemeClr val="tx1"/>
+                        </a:solidFill>
+                      </a:endParaRPr>
+                    </a:p>
+                  </a:txBody>
+                  <a:tcPr/>
+                </a:tc>
+                <a:tc>
+                  <a:txBody>
+                    <a:bodyPr/>
+                    <a:lstStyle/>
+                    <a:p>
+                      <a:r>
+                        <a:rPr lang="en-US" dirty="0">
+                          <a:solidFill>
+                            <a:schemeClr val="tx1"/>
+                          </a:solidFill>
+                        </a:rPr>
+                        <a:t>Deep learning</a:t>
+                      </a:r>
+                      <a:endParaRPr lang="en-NL" dirty="0">
+                        <a:solidFill>
+                          <a:schemeClr val="tx1"/>
+                        </a:solidFill>
+                      </a:endParaRPr>
+                    </a:p>
+                  </a:txBody>
+                  <a:tcPr/>
+                </a:tc>
+                <a:extLst>
+                  <a:ext uri="{0D108BD9-81ED-4DB2-BD59-A6C34878D82A}">
+                    <a16:rowId xmlns:a16="http://schemas.microsoft.com/office/drawing/2014/main" val="1298748235"/>
+                  </a:ext>
+                </a:extLst>
+              </a:tr>
+              <a:tr h="370840">
+                <a:tc>
+                  <a:txBody>
+                    <a:bodyPr/>
+                    <a:lstStyle/>
+                    <a:p>
+                      <a:r>
+                        <a:rPr lang="en-US" dirty="0"/>
+                        <a:t>Training cost</a:t>
+                      </a:r>
+                      <a:endParaRPr lang="en-NL" dirty="0"/>
+                    </a:p>
+                  </a:txBody>
+                  <a:tcPr/>
+                </a:tc>
+                <a:tc>
+                  <a:txBody>
+                    <a:bodyPr/>
+                    <a:lstStyle/>
+                    <a:p>
+                      <a:r>
+                        <a:rPr lang="en-US" dirty="0"/>
+                        <a:t>Low</a:t>
+                      </a:r>
+                      <a:endParaRPr lang="en-NL" dirty="0"/>
+                    </a:p>
+                  </a:txBody>
+                  <a:tcPr>
+                    <a:solidFill>
+                      <a:srgbClr val="00B050"/>
+                    </a:solidFill>
+                  </a:tcPr>
+                </a:tc>
+                <a:tc>
+                  <a:txBody>
+                    <a:bodyPr/>
+                    <a:lstStyle/>
+                    <a:p>
+                      <a:r>
+                        <a:rPr lang="en-US" dirty="0"/>
+                        <a:t>High</a:t>
+                      </a:r>
+                      <a:endParaRPr lang="en-NL" dirty="0"/>
+                    </a:p>
+                  </a:txBody>
+                  <a:tcPr>
+                    <a:solidFill>
+                      <a:srgbClr val="FF0000"/>
+                    </a:solidFill>
+                  </a:tcPr>
+                </a:tc>
+                <a:extLst>
+                  <a:ext uri="{0D108BD9-81ED-4DB2-BD59-A6C34878D82A}">
+                    <a16:rowId xmlns:a16="http://schemas.microsoft.com/office/drawing/2014/main" val="2753067509"/>
+                  </a:ext>
+                </a:extLst>
+              </a:tr>
+              <a:tr h="370840">
+                <a:tc>
+                  <a:txBody>
+                    <a:bodyPr/>
+                    <a:lstStyle/>
+                    <a:p>
+                      <a:r>
+                        <a:rPr lang="en-US" dirty="0"/>
+                        <a:t>Inference cost</a:t>
+                      </a:r>
+                      <a:endParaRPr lang="en-NL" dirty="0"/>
+                    </a:p>
+                  </a:txBody>
+                  <a:tcPr/>
+                </a:tc>
+                <a:tc>
+                  <a:txBody>
+                    <a:bodyPr/>
+                    <a:lstStyle/>
+                    <a:p>
+                      <a:r>
+                        <a:rPr lang="en-US" dirty="0"/>
+                        <a:t>High</a:t>
+                      </a:r>
+                      <a:endParaRPr lang="en-NL" dirty="0"/>
+                    </a:p>
+                  </a:txBody>
+                  <a:tcPr>
+                    <a:solidFill>
+                      <a:srgbClr val="FF0000"/>
+                    </a:solidFill>
+                  </a:tcPr>
+                </a:tc>
+                <a:tc>
+                  <a:txBody>
+                    <a:bodyPr/>
+                    <a:lstStyle/>
+                    <a:p>
+                      <a:r>
+                        <a:rPr lang="en-US" dirty="0"/>
+                        <a:t>Low</a:t>
+                      </a:r>
+                      <a:endParaRPr lang="en-NL" dirty="0"/>
+                    </a:p>
+                  </a:txBody>
+                  <a:tcPr>
+                    <a:solidFill>
+                      <a:srgbClr val="00B050"/>
+                    </a:solidFill>
+                  </a:tcPr>
+                </a:tc>
+                <a:extLst>
+                  <a:ext uri="{0D108BD9-81ED-4DB2-BD59-A6C34878D82A}">
+                    <a16:rowId xmlns:a16="http://schemas.microsoft.com/office/drawing/2014/main" val="922284759"/>
+                  </a:ext>
+                </a:extLst>
+              </a:tr>
+              <a:tr h="370840">
+                <a:tc>
+                  <a:txBody>
+                    <a:bodyPr/>
+                    <a:lstStyle/>
+                    <a:p>
+                      <a:r>
+                        <a:rPr lang="en-US" dirty="0"/>
+                        <a:t>Prior needed?</a:t>
+                      </a:r>
+                      <a:endParaRPr lang="en-NL" dirty="0"/>
+                    </a:p>
+                  </a:txBody>
+                  <a:tcPr/>
+                </a:tc>
+                <a:tc>
+                  <a:txBody>
+                    <a:bodyPr/>
+                    <a:lstStyle/>
+                    <a:p>
+                      <a:r>
+                        <a:rPr lang="en-US" dirty="0"/>
+                        <a:t>Yes – mathematical description</a:t>
+                      </a:r>
+                      <a:endParaRPr lang="en-NL" dirty="0"/>
+                    </a:p>
+                  </a:txBody>
+                  <a:tcPr>
+                    <a:solidFill>
+                      <a:srgbClr val="FFFF00"/>
+                    </a:solidFill>
+                  </a:tcPr>
+                </a:tc>
+                <a:tc>
+                  <a:txBody>
+                    <a:bodyPr/>
+                    <a:lstStyle/>
+                    <a:p>
+                      <a:r>
+                        <a:rPr lang="en-US" dirty="0"/>
+                        <a:t>Yes – ability to sample</a:t>
+                      </a:r>
+                      <a:endParaRPr lang="en-NL" dirty="0"/>
+                    </a:p>
+                  </a:txBody>
+                  <a:tcPr>
+                    <a:solidFill>
+                      <a:srgbClr val="FFFF00"/>
+                    </a:solidFill>
+                  </a:tcPr>
+                </a:tc>
+                <a:extLst>
+                  <a:ext uri="{0D108BD9-81ED-4DB2-BD59-A6C34878D82A}">
+                    <a16:rowId xmlns:a16="http://schemas.microsoft.com/office/drawing/2014/main" val="3302359262"/>
+                  </a:ext>
+                </a:extLst>
+              </a:tr>
+              <a:tr h="370840">
+                <a:tc>
+                  <a:txBody>
+                    <a:bodyPr/>
+                    <a:lstStyle/>
+                    <a:p>
+                      <a:r>
+                        <a:rPr lang="en-US" dirty="0"/>
+                        <a:t>Uncertainty reported?</a:t>
+                      </a:r>
+                      <a:endParaRPr lang="en-NL" dirty="0"/>
+                    </a:p>
+                  </a:txBody>
+                  <a:tcPr/>
+                </a:tc>
+                <a:tc>
+                  <a:txBody>
+                    <a:bodyPr/>
+                    <a:lstStyle/>
+                    <a:p>
+                      <a:r>
+                        <a:rPr lang="en-US" dirty="0"/>
+                        <a:t>Implicitly available</a:t>
+                      </a:r>
+                      <a:endParaRPr lang="en-NL" dirty="0"/>
+                    </a:p>
+                  </a:txBody>
+                  <a:tcPr>
+                    <a:solidFill>
+                      <a:srgbClr val="00B050"/>
+                    </a:solidFill>
+                  </a:tcPr>
+                </a:tc>
+                <a:tc>
+                  <a:txBody>
+                    <a:bodyPr/>
+                    <a:lstStyle/>
+                    <a:p>
+                      <a:r>
+                        <a:rPr lang="en-US" dirty="0"/>
+                        <a:t>Only for some approaches</a:t>
+                      </a:r>
+                      <a:endParaRPr lang="en-NL" dirty="0"/>
+                    </a:p>
+                  </a:txBody>
+                  <a:tcPr>
+                    <a:solidFill>
+                      <a:srgbClr val="FFFF00"/>
+                    </a:solidFill>
+                  </a:tcPr>
+                </a:tc>
+                <a:extLst>
+                  <a:ext uri="{0D108BD9-81ED-4DB2-BD59-A6C34878D82A}">
+                    <a16:rowId xmlns:a16="http://schemas.microsoft.com/office/drawing/2014/main" val="1968444148"/>
+                  </a:ext>
+                </a:extLst>
+              </a:tr>
+            </a:tbl>
+          </a:graphicData>
+        </a:graphic>
+      </p:graphicFrame>
     </p:spTree>
     <p:extLst>
       <p:ext uri="{BB962C8B-B14F-4D97-AF65-F5344CB8AC3E}">
@@ -9864,7 +10075,7 @@
 </p:sld>
 </file>
 
-<file path=ppt/slides/slide13.xml><?xml version="1.0" encoding="utf-8"?>
+<file path=ppt/slides/slide12.xml><?xml version="1.0" encoding="utf-8"?>
 <p:sld xmlns:a="http://schemas.openxmlformats.org/drawingml/2006/main" xmlns:r="http://schemas.openxmlformats.org/officeDocument/2006/relationships" xmlns:p="http://schemas.openxmlformats.org/presentationml/2006/main">
   <p:cSld>
     <p:spTree>
@@ -9921,7 +10132,7 @@
             </a:pPr>
             <a:fld id="{00000000-1234-1234-1234-123412341234}" type="slidenum">
               <a:rPr lang="en-US"/>
-              <a:t>13</a:t>
+              <a:t>12</a:t>
             </a:fld>
             <a:endParaRPr/>
           </a:p>
@@ -10035,7 +10246,7 @@
 </p:sld>
 </file>
 
-<file path=ppt/slides/slide14.xml><?xml version="1.0" encoding="utf-8"?>
+<file path=ppt/slides/slide13.xml><?xml version="1.0" encoding="utf-8"?>
 <p:sld xmlns:a="http://schemas.openxmlformats.org/drawingml/2006/main" xmlns:r="http://schemas.openxmlformats.org/officeDocument/2006/relationships" xmlns:p="http://schemas.openxmlformats.org/presentationml/2006/main">
   <p:cSld>
     <p:bg>
@@ -10175,7 +10386,7 @@
             </a:pPr>
             <a:fld id="{00000000-1234-1234-1234-123412341234}" type="slidenum">
               <a:rPr lang="en-US"/>
-              <a:t>14</a:t>
+              <a:t>13</a:t>
             </a:fld>
             <a:endParaRPr/>
           </a:p>
@@ -14663,7 +14874,7 @@
         </p:blipFill>
         <p:spPr bwMode="auto">
           <a:xfrm>
-            <a:off x="998414" y="591750"/>
+            <a:off x="482739" y="702584"/>
             <a:ext cx="2297956" cy="1980000"/>
           </a:xfrm>
           <a:prstGeom prst="rect">
@@ -14720,7 +14931,7 @@
         </p:blipFill>
         <p:spPr bwMode="auto">
           <a:xfrm>
-            <a:off x="3715078" y="627704"/>
+            <a:off x="3371712" y="702584"/>
             <a:ext cx="2297956" cy="1980000"/>
           </a:xfrm>
           <a:prstGeom prst="rect">
@@ -14777,8 +14988,8 @@
         </p:blipFill>
         <p:spPr bwMode="auto">
           <a:xfrm>
-            <a:off x="3760343" y="2644858"/>
-            <a:ext cx="2312409" cy="1980000"/>
+            <a:off x="3371712" y="2682584"/>
+            <a:ext cx="2269052" cy="1980000"/>
           </a:xfrm>
           <a:prstGeom prst="rect">
             <a:avLst/>
@@ -14834,7 +15045,7 @@
         </p:blipFill>
         <p:spPr bwMode="auto">
           <a:xfrm>
-            <a:off x="6431742" y="518642"/>
+            <a:off x="6260686" y="702584"/>
             <a:ext cx="2297956" cy="1980000"/>
           </a:xfrm>
           <a:prstGeom prst="rect">
@@ -14891,8 +15102,8 @@
         </p:blipFill>
         <p:spPr bwMode="auto">
           <a:xfrm>
-            <a:off x="6421105" y="2644858"/>
-            <a:ext cx="2312409" cy="1980000"/>
+            <a:off x="6260686" y="2682584"/>
+            <a:ext cx="2269052" cy="1980000"/>
           </a:xfrm>
           <a:prstGeom prst="rect">
             <a:avLst/>
@@ -15263,7 +15474,7 @@
         </p:blipFill>
         <p:spPr bwMode="auto">
           <a:xfrm>
-            <a:off x="450940" y="460833"/>
+            <a:off x="482739" y="702584"/>
             <a:ext cx="2297956" cy="1980000"/>
           </a:xfrm>
           <a:prstGeom prst="rect">
@@ -15320,7 +15531,7 @@
         </p:blipFill>
         <p:spPr bwMode="auto">
           <a:xfrm>
-            <a:off x="3256192" y="460833"/>
+            <a:off x="3371712" y="702584"/>
             <a:ext cx="2297956" cy="1980000"/>
           </a:xfrm>
           <a:prstGeom prst="rect">
@@ -15377,8 +15588,8 @@
         </p:blipFill>
         <p:spPr bwMode="auto">
           <a:xfrm>
-            <a:off x="3256192" y="2572950"/>
-            <a:ext cx="2269051" cy="1980000"/>
+            <a:off x="3371712" y="2682584"/>
+            <a:ext cx="2269052" cy="1980000"/>
           </a:xfrm>
           <a:prstGeom prst="rect">
             <a:avLst/>
@@ -15434,7 +15645,7 @@
         </p:blipFill>
         <p:spPr bwMode="auto">
           <a:xfrm>
-            <a:off x="6144117" y="524758"/>
+            <a:off x="6260686" y="702584"/>
             <a:ext cx="2297956" cy="1980000"/>
           </a:xfrm>
           <a:prstGeom prst="rect">
@@ -15491,8 +15702,8 @@
         </p:blipFill>
         <p:spPr bwMode="auto">
           <a:xfrm>
-            <a:off x="6164981" y="2528571"/>
-            <a:ext cx="2269051" cy="1980000"/>
+            <a:off x="6260686" y="2682584"/>
+            <a:ext cx="2269052" cy="1980000"/>
           </a:xfrm>
           <a:prstGeom prst="rect">
             <a:avLst/>
@@ -15818,7 +16029,7 @@
         </p:blipFill>
         <p:spPr bwMode="auto">
           <a:xfrm>
-            <a:off x="470686" y="535069"/>
+            <a:off x="482739" y="702584"/>
             <a:ext cx="2297956" cy="1980000"/>
           </a:xfrm>
           <a:prstGeom prst="rect">
@@ -15865,7 +16076,7 @@
         </p:blipFill>
         <p:spPr bwMode="auto">
           <a:xfrm>
-            <a:off x="3280332" y="535069"/>
+            <a:off x="3371712" y="702584"/>
             <a:ext cx="2297956" cy="1980000"/>
           </a:xfrm>
           <a:prstGeom prst="rect">
@@ -15912,8 +16123,8 @@
         </p:blipFill>
         <p:spPr bwMode="auto">
           <a:xfrm>
-            <a:off x="3280332" y="2570550"/>
-            <a:ext cx="2355766" cy="1980000"/>
+            <a:off x="3371712" y="2682584"/>
+            <a:ext cx="2269052" cy="1980000"/>
           </a:xfrm>
           <a:prstGeom prst="rect">
             <a:avLst/>
@@ -15959,7 +16170,7 @@
         </p:blipFill>
         <p:spPr bwMode="auto">
           <a:xfrm>
-            <a:off x="6164981" y="590550"/>
+            <a:off x="6260686" y="702584"/>
             <a:ext cx="2297956" cy="1980000"/>
           </a:xfrm>
           <a:prstGeom prst="rect">
@@ -16006,8 +16217,8 @@
         </p:blipFill>
         <p:spPr bwMode="auto">
           <a:xfrm>
-            <a:off x="6164981" y="2676058"/>
-            <a:ext cx="2355766" cy="1980000"/>
+            <a:off x="6260686" y="2682584"/>
+            <a:ext cx="2269052" cy="1980000"/>
           </a:xfrm>
           <a:prstGeom prst="rect">
             <a:avLst/>
@@ -16045,7 +16256,7 @@
         <p:cNvPr id="1" name="Shape 73">
           <a:extLst>
             <a:ext uri="{FF2B5EF4-FFF2-40B4-BE49-F238E27FC236}">
-              <a16:creationId xmlns:a16="http://schemas.microsoft.com/office/drawing/2014/main" id="{FAFD8682-256A-4B37-9EF6-D4421E82202A}"/>
+              <a16:creationId xmlns:a16="http://schemas.microsoft.com/office/drawing/2014/main" id="{B23D8C49-2CDB-03F8-23B2-52B81A4110F0}"/>
             </a:ext>
           </a:extLst>
         </p:cNvPr>
@@ -16065,7 +16276,7 @@
           <p:cNvPr id="75" name="Google Shape;75;p3">
             <a:extLst>
               <a:ext uri="{FF2B5EF4-FFF2-40B4-BE49-F238E27FC236}">
-                <a16:creationId xmlns:a16="http://schemas.microsoft.com/office/drawing/2014/main" id="{121856B9-9D1A-B8EA-0F25-306CEA762D9B}"/>
+                <a16:creationId xmlns:a16="http://schemas.microsoft.com/office/drawing/2014/main" id="{65229B62-7007-3837-0ABE-EF3D0284306E}"/>
               </a:ext>
             </a:extLst>
           </p:cNvPr>
@@ -16117,7 +16328,7 @@
           <p:cNvPr id="76" name="Google Shape;76;p3">
             <a:extLst>
               <a:ext uri="{FF2B5EF4-FFF2-40B4-BE49-F238E27FC236}">
-                <a16:creationId xmlns:a16="http://schemas.microsoft.com/office/drawing/2014/main" id="{A5B5F966-6E6C-1384-4D19-68E6ABEAE227}"/>
+                <a16:creationId xmlns:a16="http://schemas.microsoft.com/office/drawing/2014/main" id="{1C67E41A-BF9A-80CB-EC7B-9D8B1363F463}"/>
               </a:ext>
             </a:extLst>
           </p:cNvPr>
@@ -16162,31 +16373,7 @@
                 <a:cs typeface="Inter"/>
                 <a:sym typeface="Inter"/>
               </a:rPr>
-              <a:t>All except </a:t>
-            </a:r>
-            <a:r>
-              <a:rPr lang="en-US" sz="1200" b="1" dirty="0" err="1">
-                <a:solidFill>
-                  <a:schemeClr val="dk1"/>
-                </a:solidFill>
-                <a:latin typeface="Inter"/>
-                <a:ea typeface="Inter"/>
-                <a:cs typeface="Inter"/>
-                <a:sym typeface="Inter"/>
-              </a:rPr>
-              <a:t>FlatVel</a:t>
-            </a:r>
-            <a:r>
-              <a:rPr lang="en-US" sz="1200" b="1" dirty="0">
-                <a:solidFill>
-                  <a:schemeClr val="dk1"/>
-                </a:solidFill>
-                <a:latin typeface="Inter"/>
-                <a:ea typeface="Inter"/>
-                <a:cs typeface="Inter"/>
-                <a:sym typeface="Inter"/>
-              </a:rPr>
-              <a:t> and Style: 2D total variation prior </a:t>
+              <a:t>Bayesian Full Waveform Inversion with BFGS and Gauss-Newton</a:t>
             </a:r>
             <a:endParaRPr sz="1600" b="1" dirty="0">
               <a:solidFill>
@@ -16205,7 +16392,7 @@
           <p:cNvPr id="77" name="Google Shape;77;p3">
             <a:extLst>
               <a:ext uri="{FF2B5EF4-FFF2-40B4-BE49-F238E27FC236}">
-                <a16:creationId xmlns:a16="http://schemas.microsoft.com/office/drawing/2014/main" id="{48A40356-B764-9F0D-FF23-ECD642135D85}"/>
+                <a16:creationId xmlns:a16="http://schemas.microsoft.com/office/drawing/2014/main" id="{F3290FFB-39C9-3C0E-3BFA-CB6937F6DB24}"/>
               </a:ext>
             </a:extLst>
           </p:cNvPr>
@@ -16234,10 +16421,10 @@
       </p:cxnSp>
       <p:sp>
         <p:nvSpPr>
-          <p:cNvPr id="2" name="Google Shape;100;p6">
+          <p:cNvPr id="3" name="Google Shape;91;p5">
             <a:extLst>
               <a:ext uri="{FF2B5EF4-FFF2-40B4-BE49-F238E27FC236}">
-                <a16:creationId xmlns:a16="http://schemas.microsoft.com/office/drawing/2014/main" id="{7AC158C5-7DB8-B116-5715-9BA900ABECA2}"/>
+                <a16:creationId xmlns:a16="http://schemas.microsoft.com/office/drawing/2014/main" id="{9FAF151A-E84C-22F7-8344-6B42C3771F10}"/>
               </a:ext>
             </a:extLst>
           </p:cNvPr>
@@ -16246,8 +16433,8 @@
         </p:nvSpPr>
         <p:spPr>
           <a:xfrm>
-            <a:off x="1219200" y="997227"/>
-            <a:ext cx="6019800" cy="1569620"/>
+            <a:off x="1219200" y="1055133"/>
+            <a:ext cx="5829300" cy="4154943"/>
           </a:xfrm>
           <a:prstGeom prst="rect">
             <a:avLst/>
@@ -16263,7 +16450,7 @@
           </a:bodyPr>
           <a:lstStyle/>
           <a:p>
-            <a:pPr marR="0" lvl="0" algn="l" rtl="0">
+            <a:pPr marL="285750" marR="0" lvl="0" indent="-285750" algn="l" rtl="0">
               <a:lnSpc>
                 <a:spcPct val="120000"/>
               </a:lnSpc>
@@ -16277,6 +16464,8 @@
                 <a:schemeClr val="dk1"/>
               </a:buClr>
               <a:buSzPts val="2000"/>
+              <a:buFont typeface="Arial"/>
+              <a:buChar char="•"/>
             </a:pPr>
             <a:r>
               <a:rPr lang="en-US" sz="2000" dirty="0">
@@ -16285,13 +16474,14 @@
                 </a:solidFill>
                 <a:latin typeface="Inter"/>
                 <a:ea typeface="Inter"/>
+                <a:cs typeface="Inter"/>
                 <a:sym typeface="Inter"/>
               </a:rPr>
-              <a:t>For each, shortly describe prior</a:t>
+              <a:t>Solver makes use of BFGS and Gauss-Newton in various combinations per family</a:t>
             </a:r>
           </a:p>
           <a:p>
-            <a:pPr marR="0" lvl="0" algn="l" rtl="0">
+            <a:pPr marL="285750" marR="0" lvl="0" indent="-285750" algn="l" rtl="0">
               <a:lnSpc>
                 <a:spcPct val="120000"/>
               </a:lnSpc>
@@ -16305,6 +16495,8 @@
                 <a:schemeClr val="dk1"/>
               </a:buClr>
               <a:buSzPts val="2000"/>
+              <a:buFont typeface="Arial"/>
+              <a:buChar char="•"/>
             </a:pPr>
             <a:r>
               <a:rPr lang="en-US" sz="2000" dirty="0">
@@ -16313,13 +16505,14 @@
                 </a:solidFill>
                 <a:latin typeface="Inter"/>
                 <a:ea typeface="Inter"/>
+                <a:cs typeface="Inter"/>
                 <a:sym typeface="Inter"/>
               </a:rPr>
-              <a:t>Show an example (ground truth-&gt;DL-&gt;final)</a:t>
+              <a:t>History size for BFGS was unlimited – even beyond the number of parameters</a:t>
             </a:r>
           </a:p>
           <a:p>
-            <a:pPr marR="0" lvl="0" algn="l" rtl="0">
+            <a:pPr marL="285750" marR="0" lvl="0" indent="-285750" algn="l" rtl="0">
               <a:lnSpc>
                 <a:spcPct val="120000"/>
               </a:lnSpc>
@@ -16333,6 +16526,8 @@
                 <a:schemeClr val="dk1"/>
               </a:buClr>
               <a:buSzPts val="2000"/>
+              <a:buFont typeface="Arial"/>
+              <a:buChar char="•"/>
             </a:pPr>
             <a:r>
               <a:rPr lang="en-US" sz="2000" dirty="0">
@@ -16341,13 +16536,14 @@
                 </a:solidFill>
                 <a:latin typeface="Inter"/>
                 <a:ea typeface="Inter"/>
+                <a:cs typeface="Inter"/>
                 <a:sym typeface="Inter"/>
               </a:rPr>
-              <a:t>If relevant show a prior example</a:t>
+              <a:t>Gauss-Newton is always with full inversion (not iterative approximation)</a:t>
             </a:r>
           </a:p>
           <a:p>
-            <a:pPr marR="0" lvl="0" algn="l" rtl="0">
+            <a:pPr marL="285750" marR="0" lvl="0" indent="-285750" algn="l" rtl="0">
               <a:lnSpc>
                 <a:spcPct val="120000"/>
               </a:lnSpc>
@@ -16361,6 +16557,8 @@
                 <a:schemeClr val="dk1"/>
               </a:buClr>
               <a:buSzPts val="2000"/>
+              <a:buFont typeface="Arial"/>
+              <a:buChar char="•"/>
             </a:pPr>
             <a:r>
               <a:rPr lang="en-US" sz="2000" dirty="0">
@@ -16369,17 +16567,77 @@
                 </a:solidFill>
                 <a:latin typeface="Inter"/>
                 <a:ea typeface="Inter"/>
+                <a:cs typeface="Inter"/>
                 <a:sym typeface="Inter"/>
               </a:rPr>
-              <a:t>Mention public test set score</a:t>
+              <a:t>The final choice is not really optimal; it evolved this way because I kept refining and reusing previous results</a:t>
             </a:r>
+          </a:p>
+          <a:p>
+            <a:pPr marL="285750" marR="0" lvl="0" indent="-285750" algn="l" rtl="0">
+              <a:lnSpc>
+                <a:spcPct val="120000"/>
+              </a:lnSpc>
+              <a:spcBef>
+                <a:spcPts val="0"/>
+              </a:spcBef>
+              <a:spcAft>
+                <a:spcPts val="0"/>
+              </a:spcAft>
+              <a:buClr>
+                <a:schemeClr val="dk1"/>
+              </a:buClr>
+              <a:buSzPts val="2000"/>
+              <a:buFont typeface="Arial"/>
+              <a:buChar char="•"/>
+            </a:pPr>
+            <a:r>
+              <a:rPr lang="en-US" sz="2000" dirty="0">
+                <a:solidFill>
+                  <a:schemeClr val="dk1"/>
+                </a:solidFill>
+                <a:latin typeface="Inter"/>
+                <a:ea typeface="Inter"/>
+                <a:cs typeface="Inter"/>
+                <a:sym typeface="Inter"/>
+              </a:rPr>
+              <a:t>I could find no benefit from preconditioning</a:t>
+            </a:r>
+          </a:p>
+          <a:p>
+            <a:pPr marL="285750" marR="0" lvl="0" indent="-285750" algn="l" rtl="0">
+              <a:lnSpc>
+                <a:spcPct val="120000"/>
+              </a:lnSpc>
+              <a:spcBef>
+                <a:spcPts val="0"/>
+              </a:spcBef>
+              <a:spcAft>
+                <a:spcPts val="0"/>
+              </a:spcAft>
+              <a:buClr>
+                <a:schemeClr val="dk1"/>
+              </a:buClr>
+              <a:buSzPts val="2000"/>
+              <a:buFont typeface="Arial"/>
+              <a:buChar char="•"/>
+            </a:pPr>
+            <a:endParaRPr lang="en-US" sz="2000" dirty="0">
+              <a:solidFill>
+                <a:schemeClr val="dk1"/>
+              </a:solidFill>
+              <a:latin typeface="Inter"/>
+              <a:ea typeface="Inter"/>
+              <a:cs typeface="Inter"/>
+              <a:sym typeface="Inter"/>
+            </a:endParaRPr>
           </a:p>
         </p:txBody>
       </p:sp>
     </p:spTree>
     <p:extLst>
       <p:ext uri="{BB962C8B-B14F-4D97-AF65-F5344CB8AC3E}">
-        <p14:creationId xmlns:p14="http://schemas.microsoft.com/office/powerpoint/2010/main" val="2588510742"/>
+        <p14:creationId xmlns:p14="http://schemas.microsoft.com/office/powerpoint/2010/main" val="2718900522"/>
       </p:ext>
     </p:extLst>
   </p:cSld>
@@ -16949,4 +17207,299 @@
   <a:objectDefaults/>
   <a:extraClrSchemeLst/>
 </a:theme>
+</file>
+
+<file path=ppt/theme/theme3.xml><?xml version="1.0" encoding="utf-8"?>
+<a:theme xmlns:a="http://schemas.openxmlformats.org/drawingml/2006/main" name="Office Theme">
+  <a:themeElements>
+    <a:clrScheme name="Office">
+      <a:dk1>
+        <a:sysClr val="windowText" lastClr="000000"/>
+      </a:dk1>
+      <a:lt1>
+        <a:sysClr val="window" lastClr="FFFFFF"/>
+      </a:lt1>
+      <a:dk2>
+        <a:srgbClr val="44546A"/>
+      </a:dk2>
+      <a:lt2>
+        <a:srgbClr val="E7E6E6"/>
+      </a:lt2>
+      <a:accent1>
+        <a:srgbClr val="4472C4"/>
+      </a:accent1>
+      <a:accent2>
+        <a:srgbClr val="ED7D31"/>
+      </a:accent2>
+      <a:accent3>
+        <a:srgbClr val="A5A5A5"/>
+      </a:accent3>
+      <a:accent4>
+        <a:srgbClr val="FFC000"/>
+      </a:accent4>
+      <a:accent5>
+        <a:srgbClr val="5B9BD5"/>
+      </a:accent5>
+      <a:accent6>
+        <a:srgbClr val="70AD47"/>
+      </a:accent6>
+      <a:hlink>
+        <a:srgbClr val="0563C1"/>
+      </a:hlink>
+      <a:folHlink>
+        <a:srgbClr val="954F72"/>
+      </a:folHlink>
+    </a:clrScheme>
+    <a:fontScheme name="Office">
+      <a:majorFont>
+        <a:latin typeface="Calibri Light" panose="020F0302020204030204"/>
+        <a:ea typeface=""/>
+        <a:cs typeface=""/>
+        <a:font script="Jpan" typeface="游ゴシック Light"/>
+        <a:font script="Hang" typeface="맑은 고딕"/>
+        <a:font script="Hans" typeface="等线 Light"/>
+        <a:font script="Hant" typeface="新細明體"/>
+        <a:font script="Arab" typeface="Times New Roman"/>
+        <a:font script="Hebr" typeface="Times New Roman"/>
+        <a:font script="Thai" typeface="Angsana New"/>
+        <a:font script="Ethi" typeface="Nyala"/>
+        <a:font script="Beng" typeface="Vrinda"/>
+        <a:font script="Gujr" typeface="Shruti"/>
+        <a:font script="Khmr" typeface="MoolBoran"/>
+        <a:font script="Knda" typeface="Tunga"/>
+        <a:font script="Guru" typeface="Raavi"/>
+        <a:font script="Cans" typeface="Euphemia"/>
+        <a:font script="Cher" typeface="Plantagenet Cherokee"/>
+        <a:font script="Yiii" typeface="Microsoft Yi Baiti"/>
+        <a:font script="Tibt" typeface="Microsoft Himalaya"/>
+        <a:font script="Thaa" typeface="MV Boli"/>
+        <a:font script="Deva" typeface="Mangal"/>
+        <a:font script="Telu" typeface="Gautami"/>
+        <a:font script="Taml" typeface="Latha"/>
+        <a:font script="Syrc" typeface="Estrangelo Edessa"/>
+        <a:font script="Orya" typeface="Kalinga"/>
+        <a:font script="Mlym" typeface="Kartika"/>
+        <a:font script="Laoo" typeface="DokChampa"/>
+        <a:font script="Sinh" typeface="Iskoola Pota"/>
+        <a:font script="Mong" typeface="Mongolian Baiti"/>
+        <a:font script="Viet" typeface="Times New Roman"/>
+        <a:font script="Uigh" typeface="Microsoft Uighur"/>
+        <a:font script="Geor" typeface="Sylfaen"/>
+        <a:font script="Armn" typeface="Arial"/>
+        <a:font script="Bugi" typeface="Leelawadee UI"/>
+        <a:font script="Bopo" typeface="Microsoft JhengHei"/>
+        <a:font script="Java" typeface="Javanese Text"/>
+        <a:font script="Lisu" typeface="Segoe UI"/>
+        <a:font script="Mymr" typeface="Myanmar Text"/>
+        <a:font script="Nkoo" typeface="Ebrima"/>
+        <a:font script="Olck" typeface="Nirmala UI"/>
+        <a:font script="Osma" typeface="Ebrima"/>
+        <a:font script="Phag" typeface="Phagspa"/>
+        <a:font script="Syrn" typeface="Estrangelo Edessa"/>
+        <a:font script="Syrj" typeface="Estrangelo Edessa"/>
+        <a:font script="Syre" typeface="Estrangelo Edessa"/>
+        <a:font script="Sora" typeface="Nirmala UI"/>
+        <a:font script="Tale" typeface="Microsoft Tai Le"/>
+        <a:font script="Talu" typeface="Microsoft New Tai Lue"/>
+        <a:font script="Tfng" typeface="Ebrima"/>
+      </a:majorFont>
+      <a:minorFont>
+        <a:latin typeface="Calibri" panose="020F0502020204030204"/>
+        <a:ea typeface=""/>
+        <a:cs typeface=""/>
+        <a:font script="Jpan" typeface="游ゴシック"/>
+        <a:font script="Hang" typeface="맑은 고딕"/>
+        <a:font script="Hans" typeface="等线"/>
+        <a:font script="Hant" typeface="新細明體"/>
+        <a:font script="Arab" typeface="Arial"/>
+        <a:font script="Hebr" typeface="Arial"/>
+        <a:font script="Thai" typeface="Cordia New"/>
+        <a:font script="Ethi" typeface="Nyala"/>
+        <a:font script="Beng" typeface="Vrinda"/>
+        <a:font script="Gujr" typeface="Shruti"/>
+        <a:font script="Khmr" typeface="DaunPenh"/>
+        <a:font script="Knda" typeface="Tunga"/>
+        <a:font script="Guru" typeface="Raavi"/>
+        <a:font script="Cans" typeface="Euphemia"/>
+        <a:font script="Cher" typeface="Plantagenet Cherokee"/>
+        <a:font script="Yiii" typeface="Microsoft Yi Baiti"/>
+        <a:font script="Tibt" typeface="Microsoft Himalaya"/>
+        <a:font script="Thaa" typeface="MV Boli"/>
+        <a:font script="Deva" typeface="Mangal"/>
+        <a:font script="Telu" typeface="Gautami"/>
+        <a:font script="Taml" typeface="Latha"/>
+        <a:font script="Syrc" typeface="Estrangelo Edessa"/>
+        <a:font script="Orya" typeface="Kalinga"/>
+        <a:font script="Mlym" typeface="Kartika"/>
+        <a:font script="Laoo" typeface="DokChampa"/>
+        <a:font script="Sinh" typeface="Iskoola Pota"/>
+        <a:font script="Mong" typeface="Mongolian Baiti"/>
+        <a:font script="Viet" typeface="Arial"/>
+        <a:font script="Uigh" typeface="Microsoft Uighur"/>
+        <a:font script="Geor" typeface="Sylfaen"/>
+        <a:font script="Armn" typeface="Arial"/>
+        <a:font script="Bugi" typeface="Leelawadee UI"/>
+        <a:font script="Bopo" typeface="Microsoft JhengHei"/>
+        <a:font script="Java" typeface="Javanese Text"/>
+        <a:font script="Lisu" typeface="Segoe UI"/>
+        <a:font script="Mymr" typeface="Myanmar Text"/>
+        <a:font script="Nkoo" typeface="Ebrima"/>
+        <a:font script="Olck" typeface="Nirmala UI"/>
+        <a:font script="Osma" typeface="Ebrima"/>
+        <a:font script="Phag" typeface="Phagspa"/>
+        <a:font script="Syrn" typeface="Estrangelo Edessa"/>
+        <a:font script="Syrj" typeface="Estrangelo Edessa"/>
+        <a:font script="Syre" typeface="Estrangelo Edessa"/>
+        <a:font script="Sora" typeface="Nirmala UI"/>
+        <a:font script="Tale" typeface="Microsoft Tai Le"/>
+        <a:font script="Talu" typeface="Microsoft New Tai Lue"/>
+        <a:font script="Tfng" typeface="Ebrima"/>
+      </a:minorFont>
+    </a:fontScheme>
+    <a:fmtScheme name="Office">
+      <a:fillStyleLst>
+        <a:solidFill>
+          <a:schemeClr val="phClr"/>
+        </a:solidFill>
+        <a:gradFill rotWithShape="1">
+          <a:gsLst>
+            <a:gs pos="0">
+              <a:schemeClr val="phClr">
+                <a:lumMod val="110000"/>
+                <a:satMod val="105000"/>
+                <a:tint val="67000"/>
+              </a:schemeClr>
+            </a:gs>
+            <a:gs pos="50000">
+              <a:schemeClr val="phClr">
+                <a:lumMod val="105000"/>
+                <a:satMod val="103000"/>
+                <a:tint val="73000"/>
+              </a:schemeClr>
+            </a:gs>
+            <a:gs pos="100000">
+              <a:schemeClr val="phClr">
+                <a:lumMod val="105000"/>
+                <a:satMod val="109000"/>
+                <a:tint val="81000"/>
+              </a:schemeClr>
+            </a:gs>
+          </a:gsLst>
+          <a:lin ang="5400000" scaled="0"/>
+        </a:gradFill>
+        <a:gradFill rotWithShape="1">
+          <a:gsLst>
+            <a:gs pos="0">
+              <a:schemeClr val="phClr">
+                <a:satMod val="103000"/>
+                <a:lumMod val="102000"/>
+                <a:tint val="94000"/>
+              </a:schemeClr>
+            </a:gs>
+            <a:gs pos="50000">
+              <a:schemeClr val="phClr">
+                <a:satMod val="110000"/>
+                <a:lumMod val="100000"/>
+                <a:shade val="100000"/>
+              </a:schemeClr>
+            </a:gs>
+            <a:gs pos="100000">
+              <a:schemeClr val="phClr">
+                <a:lumMod val="99000"/>
+                <a:satMod val="120000"/>
+                <a:shade val="78000"/>
+              </a:schemeClr>
+            </a:gs>
+          </a:gsLst>
+          <a:lin ang="5400000" scaled="0"/>
+        </a:gradFill>
+      </a:fillStyleLst>
+      <a:lnStyleLst>
+        <a:ln w="6350" cap="flat" cmpd="sng" algn="ctr">
+          <a:solidFill>
+            <a:schemeClr val="phClr"/>
+          </a:solidFill>
+          <a:prstDash val="solid"/>
+          <a:miter lim="800000"/>
+        </a:ln>
+        <a:ln w="12700" cap="flat" cmpd="sng" algn="ctr">
+          <a:solidFill>
+            <a:schemeClr val="phClr"/>
+          </a:solidFill>
+          <a:prstDash val="solid"/>
+          <a:miter lim="800000"/>
+        </a:ln>
+        <a:ln w="19050" cap="flat" cmpd="sng" algn="ctr">
+          <a:solidFill>
+            <a:schemeClr val="phClr"/>
+          </a:solidFill>
+          <a:prstDash val="solid"/>
+          <a:miter lim="800000"/>
+        </a:ln>
+      </a:lnStyleLst>
+      <a:effectStyleLst>
+        <a:effectStyle>
+          <a:effectLst/>
+        </a:effectStyle>
+        <a:effectStyle>
+          <a:effectLst/>
+        </a:effectStyle>
+        <a:effectStyle>
+          <a:effectLst>
+            <a:outerShdw blurRad="57150" dist="19050" dir="5400000" algn="ctr" rotWithShape="0">
+              <a:srgbClr val="000000">
+                <a:alpha val="63000"/>
+              </a:srgbClr>
+            </a:outerShdw>
+          </a:effectLst>
+        </a:effectStyle>
+      </a:effectStyleLst>
+      <a:bgFillStyleLst>
+        <a:solidFill>
+          <a:schemeClr val="phClr"/>
+        </a:solidFill>
+        <a:solidFill>
+          <a:schemeClr val="phClr">
+            <a:tint val="95000"/>
+            <a:satMod val="170000"/>
+          </a:schemeClr>
+        </a:solidFill>
+        <a:gradFill rotWithShape="1">
+          <a:gsLst>
+            <a:gs pos="0">
+              <a:schemeClr val="phClr">
+                <a:tint val="93000"/>
+                <a:satMod val="150000"/>
+                <a:shade val="98000"/>
+                <a:lumMod val="102000"/>
+              </a:schemeClr>
+            </a:gs>
+            <a:gs pos="50000">
+              <a:schemeClr val="phClr">
+                <a:tint val="98000"/>
+                <a:satMod val="130000"/>
+                <a:shade val="90000"/>
+                <a:lumMod val="103000"/>
+              </a:schemeClr>
+            </a:gs>
+            <a:gs pos="100000">
+              <a:schemeClr val="phClr">
+                <a:shade val="63000"/>
+                <a:satMod val="120000"/>
+              </a:schemeClr>
+            </a:gs>
+          </a:gsLst>
+          <a:lin ang="5400000" scaled="0"/>
+        </a:gradFill>
+      </a:bgFillStyleLst>
+    </a:fmtScheme>
+  </a:themeElements>
+  <a:objectDefaults/>
+  <a:extraClrSchemeLst/>
+  <a:extLst>
+    <a:ext uri="{05A4C25C-085E-4340-85A3-A5531E510DB2}">
+      <thm15:themeFamily xmlns:thm15="http://schemas.microsoft.com/office/thememl/2012/main" name="Office Theme" id="{62F939B6-93AF-4DB8-9C6B-D6C7DFDC589F}" vid="{4A3C46E8-61CC-4603-A589-7422A47A8E4A}"/>
+    </a:ext>
+  </a:extLst>
+</a:theme>
 </file>